--- a/答辩准备/答辩汇报PPT/答辩汇报PPT.pptx
+++ b/答辩准备/答辩汇报PPT/答辩汇报PPT.pptx
@@ -5374,7 +5374,7 @@
                 <a:latin typeface="Microsoft YaHei"/>
                 <a:ea typeface="Microsoft YaHei"/>
               </a:rPr>
-              <a:t>印度三站）还没用上。同一套流程换到别的气候区还能不能站住，下一步照原样复跑一遍。</a:t>
+              <a:t>印度两站、34 天）还没用上。同一套流程换到别的气候区还能不能站住，下一步照原样复跑一遍。</a:t>
             </a:r>
             <a:endParaRPr/>
           </a:p>

--- a/答辩准备/答辩汇报PPT/答辩汇报PPT.pptx
+++ b/答辩准备/答辩汇报PPT/答辩汇报PPT.pptx
@@ -1095,7 +1095,7 @@
                 <a:latin typeface="Microsoft YaHei"/>
                 <a:ea typeface="Microsoft YaHei"/>
               </a:rPr>
-              <a:t xml:space="preserve">AI × </a:t>
+              <a:t xml:space="preserve">机器学习 × </a:t>
             </a:r>
             <a:r>
               <a:rPr lang="zh-CN" sz="1650">
